--- a/output/wordlabs-organise-3day.pptx
+++ b/output/wordlabs-organise-3day.pptx
@@ -15939,11 +15939,11 @@
         <p:spPr>
           <a:xfrm>
             <a:off x="1874520" y="4096512"/>
-            <a:ext cx="6903720" cy="804672"/>
+            <a:ext cx="6903720" cy="658368"/>
           </a:xfrm>
           <a:prstGeom prst="rect">
             <a:avLst>
-              <a:gd name="adj" fmla="val 6818"/>
+              <a:gd name="adj" fmla="val 8333"/>
             </a:avLst>
           </a:prstGeom>
           <a:solidFill>
@@ -15965,12 +15965,12 @@
         </p:nvSpPr>
         <p:spPr>
           <a:xfrm>
-            <a:off x="2124837" y="4169664"/>
-            <a:ext cx="685800" cy="384048"/>
+            <a:off x="2023872" y="4169664"/>
+            <a:ext cx="685800" cy="475488"/>
           </a:xfrm>
           <a:prstGeom prst="rect">
             <a:avLst>
-              <a:gd name="adj" fmla="val 9524"/>
+              <a:gd name="adj" fmla="val 7692"/>
             </a:avLst>
           </a:prstGeom>
           <a:solidFill>
@@ -15992,8 +15992,8 @@
         </p:nvSpPr>
         <p:spPr>
           <a:xfrm>
-            <a:off x="2124837" y="4169664"/>
-            <a:ext cx="685800" cy="384048"/>
+            <a:off x="2023872" y="4169664"/>
+            <a:ext cx="685800" cy="475488"/>
           </a:xfrm>
           <a:prstGeom prst="rect">
             <a:avLst/>
@@ -16031,12 +16031,12 @@
         </p:nvSpPr>
         <p:spPr>
           <a:xfrm>
-            <a:off x="3033522" y="4169664"/>
-            <a:ext cx="685800" cy="384048"/>
+            <a:off x="2831592" y="4169664"/>
+            <a:ext cx="685800" cy="475488"/>
           </a:xfrm>
           <a:prstGeom prst="rect">
             <a:avLst>
-              <a:gd name="adj" fmla="val 9524"/>
+              <a:gd name="adj" fmla="val 7692"/>
             </a:avLst>
           </a:prstGeom>
           <a:solidFill>
@@ -16058,8 +16058,8 @@
         </p:nvSpPr>
         <p:spPr>
           <a:xfrm>
-            <a:off x="3033522" y="4169664"/>
-            <a:ext cx="685800" cy="384048"/>
+            <a:off x="2831592" y="4169664"/>
+            <a:ext cx="685800" cy="475488"/>
           </a:xfrm>
           <a:prstGeom prst="rect">
             <a:avLst/>
@@ -16097,12 +16097,12 @@
         </p:nvSpPr>
         <p:spPr>
           <a:xfrm>
-            <a:off x="3942207" y="4169664"/>
-            <a:ext cx="685800" cy="384048"/>
+            <a:off x="3639312" y="4169664"/>
+            <a:ext cx="685800" cy="475488"/>
           </a:xfrm>
           <a:prstGeom prst="rect">
             <a:avLst>
-              <a:gd name="adj" fmla="val 9524"/>
+              <a:gd name="adj" fmla="val 7692"/>
             </a:avLst>
           </a:prstGeom>
           <a:solidFill>
@@ -16124,8 +16124,8 @@
         </p:nvSpPr>
         <p:spPr>
           <a:xfrm>
-            <a:off x="3942207" y="4169664"/>
-            <a:ext cx="685800" cy="384048"/>
+            <a:off x="3639312" y="4169664"/>
+            <a:ext cx="685800" cy="475488"/>
           </a:xfrm>
           <a:prstGeom prst="rect">
             <a:avLst/>
@@ -16163,12 +16163,12 @@
         </p:nvSpPr>
         <p:spPr>
           <a:xfrm>
-            <a:off x="4850892" y="4169664"/>
-            <a:ext cx="685800" cy="384048"/>
+            <a:off x="4447032" y="4169664"/>
+            <a:ext cx="685800" cy="475488"/>
           </a:xfrm>
           <a:prstGeom prst="rect">
             <a:avLst>
-              <a:gd name="adj" fmla="val 9524"/>
+              <a:gd name="adj" fmla="val 7692"/>
             </a:avLst>
           </a:prstGeom>
           <a:solidFill>
@@ -16190,8 +16190,8 @@
         </p:nvSpPr>
         <p:spPr>
           <a:xfrm>
-            <a:off x="4850892" y="4169664"/>
-            <a:ext cx="685800" cy="384048"/>
+            <a:off x="4447032" y="4169664"/>
+            <a:ext cx="685800" cy="475488"/>
           </a:xfrm>
           <a:prstGeom prst="rect">
             <a:avLst/>
@@ -16229,12 +16229,12 @@
         </p:nvSpPr>
         <p:spPr>
           <a:xfrm>
-            <a:off x="5759577" y="4169664"/>
-            <a:ext cx="685800" cy="384048"/>
+            <a:off x="5254752" y="4169664"/>
+            <a:ext cx="685800" cy="475488"/>
           </a:xfrm>
           <a:prstGeom prst="rect">
             <a:avLst>
-              <a:gd name="adj" fmla="val 9524"/>
+              <a:gd name="adj" fmla="val 7692"/>
             </a:avLst>
           </a:prstGeom>
           <a:solidFill>
@@ -16256,8 +16256,8 @@
         </p:nvSpPr>
         <p:spPr>
           <a:xfrm>
-            <a:off x="5759577" y="4169664"/>
-            <a:ext cx="685800" cy="384048"/>
+            <a:off x="5254752" y="4169664"/>
+            <a:ext cx="685800" cy="475488"/>
           </a:xfrm>
           <a:prstGeom prst="rect">
             <a:avLst/>
@@ -16295,12 +16295,12 @@
         </p:nvSpPr>
         <p:spPr>
           <a:xfrm>
-            <a:off x="6668262" y="4169664"/>
-            <a:ext cx="685800" cy="384048"/>
+            <a:off x="6062472" y="4169664"/>
+            <a:ext cx="685800" cy="475488"/>
           </a:xfrm>
           <a:prstGeom prst="rect">
             <a:avLst>
-              <a:gd name="adj" fmla="val 9524"/>
+              <a:gd name="adj" fmla="val 7692"/>
             </a:avLst>
           </a:prstGeom>
           <a:solidFill>
@@ -16322,8 +16322,8 @@
         </p:nvSpPr>
         <p:spPr>
           <a:xfrm>
-            <a:off x="6668262" y="4169664"/>
-            <a:ext cx="685800" cy="384048"/>
+            <a:off x="6062472" y="4169664"/>
+            <a:ext cx="685800" cy="475488"/>
           </a:xfrm>
           <a:prstGeom prst="rect">
             <a:avLst/>
@@ -16355,57 +16355,18 @@
       </p:sp>
       <p:sp>
         <p:nvSpPr>
-          <p:cNvPr id="49" name="Text 47"/>
-          <p:cNvSpPr/>
-          <p:nvPr/>
-        </p:nvSpPr>
-        <p:spPr>
-          <a:xfrm>
-            <a:off x="6668262" y="4572000"/>
-            <a:ext cx="685800" cy="219456"/>
-          </a:xfrm>
-          <a:prstGeom prst="rect">
-            <a:avLst/>
-          </a:prstGeom>
-          <a:noFill/>
-          <a:ln/>
-        </p:spPr>
-        <p:txBody>
-          <a:bodyPr wrap="square" lIns="0" tIns="0" rIns="0" bIns="0" rtlCol="0" anchor="t"/>
-          <a:lstStyle/>
-          <a:p>
-            <a:pPr algn="ctr" indent="0" marL="0">
-              <a:buNone/>
-            </a:pPr>
-            <a:r>
-              <a:rPr lang="en-US" sz="750" i="1" dirty="0">
-                <a:solidFill>
-                  <a:srgbClr val="94A3B8"/>
-                </a:solidFill>
-                <a:latin typeface="Calibri" pitchFamily="34" charset="0"/>
-                <a:ea typeface="Calibri" pitchFamily="34" charset="-122"/>
-                <a:cs typeface="Calibri" pitchFamily="34" charset="-120"/>
-              </a:rPr>
-              <a:t>/z/</a:t>
-            </a:r>
-            <a:endParaRPr lang="en-US" sz="750" dirty="0"/>
-          </a:p>
-        </p:txBody>
-      </p:sp>
-      <p:sp>
-        <p:nvSpPr>
-          <p:cNvPr id="50" name="Shape 48"/>
-          <p:cNvSpPr/>
-          <p:nvPr/>
-        </p:nvSpPr>
-        <p:spPr>
-          <a:xfrm>
-            <a:off x="7576947" y="4169664"/>
-            <a:ext cx="685800" cy="384048"/>
+          <p:cNvPr id="49" name="Shape 47"/>
+          <p:cNvSpPr/>
+          <p:nvPr/>
+        </p:nvSpPr>
+        <p:spPr>
+          <a:xfrm>
+            <a:off x="6870192" y="4169664"/>
+            <a:ext cx="685800" cy="475488"/>
           </a:xfrm>
           <a:prstGeom prst="rect">
             <a:avLst>
-              <a:gd name="adj" fmla="val 9524"/>
+              <a:gd name="adj" fmla="val 7692"/>
             </a:avLst>
           </a:prstGeom>
           <a:solidFill>
@@ -16421,14 +16382,80 @@
       </p:sp>
       <p:sp>
         <p:nvSpPr>
-          <p:cNvPr id="51" name="Text 49"/>
-          <p:cNvSpPr/>
-          <p:nvPr/>
-        </p:nvSpPr>
-        <p:spPr>
-          <a:xfrm>
-            <a:off x="7576947" y="4169664"/>
-            <a:ext cx="685800" cy="384048"/>
+          <p:cNvPr id="50" name="Text 48"/>
+          <p:cNvSpPr/>
+          <p:nvPr/>
+        </p:nvSpPr>
+        <p:spPr>
+          <a:xfrm>
+            <a:off x="6870192" y="4169664"/>
+            <a:ext cx="685800" cy="475488"/>
+          </a:xfrm>
+          <a:prstGeom prst="rect">
+            <a:avLst/>
+          </a:prstGeom>
+          <a:noFill/>
+          <a:ln/>
+        </p:spPr>
+        <p:txBody>
+          <a:bodyPr wrap="square" lIns="0" tIns="0" rIns="0" bIns="0" rtlCol="0" anchor="ctr"/>
+          <a:lstStyle/>
+          <a:p>
+            <a:pPr algn="ctr" indent="0" marL="0">
+              <a:buNone/>
+            </a:pPr>
+            <a:r>
+              <a:rPr lang="en-US" sz="900" b="1" dirty="0">
+                <a:solidFill>
+                  <a:srgbClr val="9D174D"/>
+                </a:solidFill>
+                <a:latin typeface="Trebuchet MS" pitchFamily="34" charset="0"/>
+                <a:ea typeface="Trebuchet MS" pitchFamily="34" charset="-122"/>
+                <a:cs typeface="Trebuchet MS" pitchFamily="34" charset="-120"/>
+              </a:rPr>
+              <a:t>e</a:t>
+            </a:r>
+            <a:endParaRPr lang="en-US" sz="900" dirty="0"/>
+          </a:p>
+        </p:txBody>
+      </p:sp>
+      <p:sp>
+        <p:nvSpPr>
+          <p:cNvPr id="51" name="Shape 49"/>
+          <p:cNvSpPr/>
+          <p:nvPr/>
+        </p:nvSpPr>
+        <p:spPr>
+          <a:xfrm>
+            <a:off x="7677912" y="4169664"/>
+            <a:ext cx="685800" cy="475488"/>
+          </a:xfrm>
+          <a:prstGeom prst="rect">
+            <a:avLst>
+              <a:gd name="adj" fmla="val 7692"/>
+            </a:avLst>
+          </a:prstGeom>
+          <a:solidFill>
+            <a:srgbClr val="FFFFFF"/>
+          </a:solidFill>
+          <a:ln w="12700">
+            <a:solidFill>
+              <a:srgbClr val="DB2777"/>
+            </a:solidFill>
+            <a:prstDash val="solid"/>
+          </a:ln>
+        </p:spPr>
+      </p:sp>
+      <p:sp>
+        <p:nvSpPr>
+          <p:cNvPr id="52" name="Text 50"/>
+          <p:cNvSpPr/>
+          <p:nvPr/>
+        </p:nvSpPr>
+        <p:spPr>
+          <a:xfrm>
+            <a:off x="7677912" y="4169664"/>
+            <a:ext cx="685800" cy="475488"/>
           </a:xfrm>
           <a:prstGeom prst="rect">
             <a:avLst/>
@@ -35801,11 +35828,11 @@
         <p:spPr>
           <a:xfrm>
             <a:off x="1874520" y="4096512"/>
-            <a:ext cx="6903720" cy="804672"/>
+            <a:ext cx="6903720" cy="658368"/>
           </a:xfrm>
           <a:prstGeom prst="rect">
             <a:avLst>
-              <a:gd name="adj" fmla="val 6818"/>
+              <a:gd name="adj" fmla="val 8333"/>
             </a:avLst>
           </a:prstGeom>
           <a:solidFill>
@@ -35827,12 +35854,12 @@
         </p:nvSpPr>
         <p:spPr>
           <a:xfrm>
-            <a:off x="1951828" y="4169664"/>
-            <a:ext cx="603504" cy="384048"/>
+            <a:off x="1952244" y="4169664"/>
+            <a:ext cx="543652" cy="475488"/>
           </a:xfrm>
           <a:prstGeom prst="rect">
             <a:avLst>
-              <a:gd name="adj" fmla="val 9524"/>
+              <a:gd name="adj" fmla="val 7692"/>
             </a:avLst>
           </a:prstGeom>
           <a:solidFill>
@@ -35854,8 +35881,8 @@
         </p:nvSpPr>
         <p:spPr>
           <a:xfrm>
-            <a:off x="1951828" y="4169664"/>
-            <a:ext cx="603504" cy="384048"/>
+            <a:off x="1952244" y="4169664"/>
+            <a:ext cx="543652" cy="475488"/>
           </a:xfrm>
           <a:prstGeom prst="rect">
             <a:avLst/>
@@ -35893,12 +35920,12 @@
         </p:nvSpPr>
         <p:spPr>
           <a:xfrm>
-            <a:off x="2605209" y="4169664"/>
-            <a:ext cx="603504" cy="384048"/>
+            <a:off x="2546188" y="4169664"/>
+            <a:ext cx="543652" cy="475488"/>
           </a:xfrm>
           <a:prstGeom prst="rect">
             <a:avLst>
-              <a:gd name="adj" fmla="val 9524"/>
+              <a:gd name="adj" fmla="val 7692"/>
             </a:avLst>
           </a:prstGeom>
           <a:solidFill>
@@ -35920,8 +35947,8 @@
         </p:nvSpPr>
         <p:spPr>
           <a:xfrm>
-            <a:off x="2605209" y="4169664"/>
-            <a:ext cx="603504" cy="384048"/>
+            <a:off x="2546188" y="4169664"/>
+            <a:ext cx="543652" cy="475488"/>
           </a:xfrm>
           <a:prstGeom prst="rect">
             <a:avLst/>
@@ -35959,12 +35986,12 @@
         </p:nvSpPr>
         <p:spPr>
           <a:xfrm>
-            <a:off x="3258589" y="4169664"/>
-            <a:ext cx="603504" cy="384048"/>
+            <a:off x="3140133" y="4169664"/>
+            <a:ext cx="543652" cy="475488"/>
           </a:xfrm>
           <a:prstGeom prst="rect">
             <a:avLst>
-              <a:gd name="adj" fmla="val 9524"/>
+              <a:gd name="adj" fmla="val 7692"/>
             </a:avLst>
           </a:prstGeom>
           <a:solidFill>
@@ -35986,8 +36013,8 @@
         </p:nvSpPr>
         <p:spPr>
           <a:xfrm>
-            <a:off x="3258589" y="4169664"/>
-            <a:ext cx="603504" cy="384048"/>
+            <a:off x="3140133" y="4169664"/>
+            <a:ext cx="543652" cy="475488"/>
           </a:xfrm>
           <a:prstGeom prst="rect">
             <a:avLst/>
@@ -36019,57 +36046,18 @@
       </p:sp>
       <p:sp>
         <p:nvSpPr>
-          <p:cNvPr id="49" name="Text 47"/>
-          <p:cNvSpPr/>
-          <p:nvPr/>
-        </p:nvSpPr>
-        <p:spPr>
-          <a:xfrm>
-            <a:off x="3258589" y="4572000"/>
-            <a:ext cx="603504" cy="219456"/>
-          </a:xfrm>
-          <a:prstGeom prst="rect">
-            <a:avLst/>
-          </a:prstGeom>
-          <a:noFill/>
-          <a:ln/>
-        </p:spPr>
-        <p:txBody>
-          <a:bodyPr wrap="square" lIns="0" tIns="0" rIns="0" bIns="0" rtlCol="0" anchor="t"/>
-          <a:lstStyle/>
-          <a:p>
-            <a:pPr algn="ctr" indent="0" marL="0">
-              <a:buNone/>
-            </a:pPr>
-            <a:r>
-              <a:rPr lang="en-US" sz="750" i="1" dirty="0">
-                <a:solidFill>
-                  <a:srgbClr val="94A3B8"/>
-                </a:solidFill>
-                <a:latin typeface="Calibri" pitchFamily="34" charset="0"/>
-                <a:ea typeface="Calibri" pitchFamily="34" charset="-122"/>
-                <a:cs typeface="Calibri" pitchFamily="34" charset="-120"/>
-              </a:rPr>
-              <a:t>/z/</a:t>
-            </a:r>
-            <a:endParaRPr lang="en-US" sz="750" dirty="0"/>
-          </a:p>
-        </p:txBody>
-      </p:sp>
-      <p:sp>
-        <p:nvSpPr>
-          <p:cNvPr id="50" name="Shape 48"/>
-          <p:cNvSpPr/>
-          <p:nvPr/>
-        </p:nvSpPr>
-        <p:spPr>
-          <a:xfrm>
-            <a:off x="3911969" y="4169664"/>
-            <a:ext cx="603504" cy="384048"/>
+          <p:cNvPr id="49" name="Shape 47"/>
+          <p:cNvSpPr/>
+          <p:nvPr/>
+        </p:nvSpPr>
+        <p:spPr>
+          <a:xfrm>
+            <a:off x="3734077" y="4169664"/>
+            <a:ext cx="543652" cy="475488"/>
           </a:xfrm>
           <a:prstGeom prst="rect">
             <a:avLst>
-              <a:gd name="adj" fmla="val 9524"/>
+              <a:gd name="adj" fmla="val 7692"/>
             </a:avLst>
           </a:prstGeom>
           <a:solidFill>
@@ -36085,14 +36073,14 @@
       </p:sp>
       <p:sp>
         <p:nvSpPr>
-          <p:cNvPr id="51" name="Text 49"/>
-          <p:cNvSpPr/>
-          <p:nvPr/>
-        </p:nvSpPr>
-        <p:spPr>
-          <a:xfrm>
-            <a:off x="3911969" y="4169664"/>
-            <a:ext cx="603504" cy="384048"/>
+          <p:cNvPr id="50" name="Text 48"/>
+          <p:cNvSpPr/>
+          <p:nvPr/>
+        </p:nvSpPr>
+        <p:spPr>
+          <a:xfrm>
+            <a:off x="3734077" y="4169664"/>
+            <a:ext cx="543652" cy="475488"/>
           </a:xfrm>
           <a:prstGeom prst="rect">
             <a:avLst/>
@@ -36124,18 +36112,18 @@
       </p:sp>
       <p:sp>
         <p:nvSpPr>
-          <p:cNvPr id="52" name="Shape 50"/>
-          <p:cNvSpPr/>
-          <p:nvPr/>
-        </p:nvSpPr>
-        <p:spPr>
-          <a:xfrm>
-            <a:off x="4565350" y="4169664"/>
-            <a:ext cx="603504" cy="384048"/>
+          <p:cNvPr id="51" name="Shape 49"/>
+          <p:cNvSpPr/>
+          <p:nvPr/>
+        </p:nvSpPr>
+        <p:spPr>
+          <a:xfrm>
+            <a:off x="4328021" y="4169664"/>
+            <a:ext cx="543652" cy="475488"/>
           </a:xfrm>
           <a:prstGeom prst="rect">
             <a:avLst>
-              <a:gd name="adj" fmla="val 9524"/>
+              <a:gd name="adj" fmla="val 7692"/>
             </a:avLst>
           </a:prstGeom>
           <a:solidFill>
@@ -36151,14 +36139,14 @@
       </p:sp>
       <p:sp>
         <p:nvSpPr>
-          <p:cNvPr id="53" name="Text 51"/>
-          <p:cNvSpPr/>
-          <p:nvPr/>
-        </p:nvSpPr>
-        <p:spPr>
-          <a:xfrm>
-            <a:off x="4565350" y="4169664"/>
-            <a:ext cx="603504" cy="384048"/>
+          <p:cNvPr id="52" name="Text 50"/>
+          <p:cNvSpPr/>
+          <p:nvPr/>
+        </p:nvSpPr>
+        <p:spPr>
+          <a:xfrm>
+            <a:off x="4328021" y="4169664"/>
+            <a:ext cx="543652" cy="475488"/>
           </a:xfrm>
           <a:prstGeom prst="rect">
             <a:avLst/>
@@ -36190,18 +36178,18 @@
       </p:sp>
       <p:sp>
         <p:nvSpPr>
-          <p:cNvPr id="54" name="Shape 52"/>
-          <p:cNvSpPr/>
-          <p:nvPr/>
-        </p:nvSpPr>
-        <p:spPr>
-          <a:xfrm>
-            <a:off x="5218730" y="4169664"/>
-            <a:ext cx="603504" cy="384048"/>
+          <p:cNvPr id="53" name="Shape 51"/>
+          <p:cNvSpPr/>
+          <p:nvPr/>
+        </p:nvSpPr>
+        <p:spPr>
+          <a:xfrm>
+            <a:off x="4921966" y="4169664"/>
+            <a:ext cx="543652" cy="475488"/>
           </a:xfrm>
           <a:prstGeom prst="rect">
             <a:avLst>
-              <a:gd name="adj" fmla="val 9524"/>
+              <a:gd name="adj" fmla="val 7692"/>
             </a:avLst>
           </a:prstGeom>
           <a:solidFill>
@@ -36217,14 +36205,14 @@
       </p:sp>
       <p:sp>
         <p:nvSpPr>
-          <p:cNvPr id="55" name="Text 53"/>
-          <p:cNvSpPr/>
-          <p:nvPr/>
-        </p:nvSpPr>
-        <p:spPr>
-          <a:xfrm>
-            <a:off x="5218730" y="4169664"/>
-            <a:ext cx="603504" cy="384048"/>
+          <p:cNvPr id="54" name="Text 52"/>
+          <p:cNvSpPr/>
+          <p:nvPr/>
+        </p:nvSpPr>
+        <p:spPr>
+          <a:xfrm>
+            <a:off x="4921966" y="4169664"/>
+            <a:ext cx="543652" cy="475488"/>
           </a:xfrm>
           <a:prstGeom prst="rect">
             <a:avLst/>
@@ -36256,18 +36244,18 @@
       </p:sp>
       <p:sp>
         <p:nvSpPr>
-          <p:cNvPr id="56" name="Shape 54"/>
-          <p:cNvSpPr/>
-          <p:nvPr/>
-        </p:nvSpPr>
-        <p:spPr>
-          <a:xfrm>
-            <a:off x="5872111" y="4169664"/>
-            <a:ext cx="603504" cy="384048"/>
+          <p:cNvPr id="55" name="Shape 53"/>
+          <p:cNvSpPr/>
+          <p:nvPr/>
+        </p:nvSpPr>
+        <p:spPr>
+          <a:xfrm>
+            <a:off x="5515910" y="4169664"/>
+            <a:ext cx="543652" cy="475488"/>
           </a:xfrm>
           <a:prstGeom prst="rect">
             <a:avLst>
-              <a:gd name="adj" fmla="val 9524"/>
+              <a:gd name="adj" fmla="val 7692"/>
             </a:avLst>
           </a:prstGeom>
           <a:solidFill>
@@ -36283,14 +36271,14 @@
       </p:sp>
       <p:sp>
         <p:nvSpPr>
-          <p:cNvPr id="57" name="Text 55"/>
-          <p:cNvSpPr/>
-          <p:nvPr/>
-        </p:nvSpPr>
-        <p:spPr>
-          <a:xfrm>
-            <a:off x="5872111" y="4169664"/>
-            <a:ext cx="603504" cy="384048"/>
+          <p:cNvPr id="56" name="Text 54"/>
+          <p:cNvSpPr/>
+          <p:nvPr/>
+        </p:nvSpPr>
+        <p:spPr>
+          <a:xfrm>
+            <a:off x="5515910" y="4169664"/>
+            <a:ext cx="543652" cy="475488"/>
           </a:xfrm>
           <a:prstGeom prst="rect">
             <a:avLst/>
@@ -36322,18 +36310,18 @@
       </p:sp>
       <p:sp>
         <p:nvSpPr>
-          <p:cNvPr id="58" name="Shape 56"/>
-          <p:cNvSpPr/>
-          <p:nvPr/>
-        </p:nvSpPr>
-        <p:spPr>
-          <a:xfrm>
-            <a:off x="6525491" y="4169664"/>
-            <a:ext cx="603504" cy="384048"/>
+          <p:cNvPr id="57" name="Shape 55"/>
+          <p:cNvSpPr/>
+          <p:nvPr/>
+        </p:nvSpPr>
+        <p:spPr>
+          <a:xfrm>
+            <a:off x="6109855" y="4169664"/>
+            <a:ext cx="543652" cy="475488"/>
           </a:xfrm>
           <a:prstGeom prst="rect">
             <a:avLst>
-              <a:gd name="adj" fmla="val 9524"/>
+              <a:gd name="adj" fmla="val 7692"/>
             </a:avLst>
           </a:prstGeom>
           <a:solidFill>
@@ -36349,14 +36337,14 @@
       </p:sp>
       <p:sp>
         <p:nvSpPr>
-          <p:cNvPr id="59" name="Text 57"/>
-          <p:cNvSpPr/>
-          <p:nvPr/>
-        </p:nvSpPr>
-        <p:spPr>
-          <a:xfrm>
-            <a:off x="6525491" y="4169664"/>
-            <a:ext cx="603504" cy="384048"/>
+          <p:cNvPr id="58" name="Text 56"/>
+          <p:cNvSpPr/>
+          <p:nvPr/>
+        </p:nvSpPr>
+        <p:spPr>
+          <a:xfrm>
+            <a:off x="6109855" y="4169664"/>
+            <a:ext cx="543652" cy="475488"/>
           </a:xfrm>
           <a:prstGeom prst="rect">
             <a:avLst/>
@@ -36388,18 +36376,18 @@
       </p:sp>
       <p:sp>
         <p:nvSpPr>
-          <p:cNvPr id="60" name="Shape 58"/>
-          <p:cNvSpPr/>
-          <p:nvPr/>
-        </p:nvSpPr>
-        <p:spPr>
-          <a:xfrm>
-            <a:off x="7178871" y="4169664"/>
-            <a:ext cx="603504" cy="384048"/>
+          <p:cNvPr id="59" name="Shape 57"/>
+          <p:cNvSpPr/>
+          <p:nvPr/>
+        </p:nvSpPr>
+        <p:spPr>
+          <a:xfrm>
+            <a:off x="6703799" y="4169664"/>
+            <a:ext cx="543652" cy="475488"/>
           </a:xfrm>
           <a:prstGeom prst="rect">
             <a:avLst>
-              <a:gd name="adj" fmla="val 9524"/>
+              <a:gd name="adj" fmla="val 7692"/>
             </a:avLst>
           </a:prstGeom>
           <a:solidFill>
@@ -36415,14 +36403,14 @@
       </p:sp>
       <p:sp>
         <p:nvSpPr>
-          <p:cNvPr id="61" name="Text 59"/>
-          <p:cNvSpPr/>
-          <p:nvPr/>
-        </p:nvSpPr>
-        <p:spPr>
-          <a:xfrm>
-            <a:off x="7178871" y="4169664"/>
-            <a:ext cx="603504" cy="384048"/>
+          <p:cNvPr id="60" name="Text 58"/>
+          <p:cNvSpPr/>
+          <p:nvPr/>
+        </p:nvSpPr>
+        <p:spPr>
+          <a:xfrm>
+            <a:off x="6703799" y="4169664"/>
+            <a:ext cx="543652" cy="475488"/>
           </a:xfrm>
           <a:prstGeom prst="rect">
             <a:avLst/>
@@ -36454,40 +36442,67 @@
       </p:sp>
       <p:sp>
         <p:nvSpPr>
+          <p:cNvPr id="61" name="Shape 59"/>
+          <p:cNvSpPr/>
+          <p:nvPr/>
+        </p:nvSpPr>
+        <p:spPr>
+          <a:xfrm>
+            <a:off x="7297743" y="4169664"/>
+            <a:ext cx="543652" cy="475488"/>
+          </a:xfrm>
+          <a:prstGeom prst="rect">
+            <a:avLst>
+              <a:gd name="adj" fmla="val 7692"/>
+            </a:avLst>
+          </a:prstGeom>
+          <a:solidFill>
+            <a:srgbClr val="FFFFFF"/>
+          </a:solidFill>
+          <a:ln w="12700">
+            <a:solidFill>
+              <a:srgbClr val="DB2777"/>
+            </a:solidFill>
+            <a:prstDash val="solid"/>
+          </a:ln>
+        </p:spPr>
+      </p:sp>
+      <p:sp>
+        <p:nvSpPr>
           <p:cNvPr id="62" name="Text 60"/>
           <p:cNvSpPr/>
           <p:nvPr/>
         </p:nvSpPr>
         <p:spPr>
           <a:xfrm>
-            <a:off x="7178871" y="4572000"/>
-            <a:ext cx="603504" cy="219456"/>
-          </a:xfrm>
-          <a:prstGeom prst="rect">
-            <a:avLst/>
-          </a:prstGeom>
-          <a:noFill/>
-          <a:ln/>
-        </p:spPr>
-        <p:txBody>
-          <a:bodyPr wrap="square" lIns="0" tIns="0" rIns="0" bIns="0" rtlCol="0" anchor="t"/>
-          <a:lstStyle/>
-          <a:p>
-            <a:pPr algn="ctr" indent="0" marL="0">
-              <a:buNone/>
-            </a:pPr>
-            <a:r>
-              <a:rPr lang="en-US" sz="750" i="1" dirty="0">
-                <a:solidFill>
-                  <a:srgbClr val="94A3B8"/>
-                </a:solidFill>
-                <a:latin typeface="Calibri" pitchFamily="34" charset="0"/>
-                <a:ea typeface="Calibri" pitchFamily="34" charset="-122"/>
-                <a:cs typeface="Calibri" pitchFamily="34" charset="-120"/>
-              </a:rPr>
-              <a:t>/z/</a:t>
-            </a:r>
-            <a:endParaRPr lang="en-US" sz="750" dirty="0"/>
+            <a:off x="7297743" y="4169664"/>
+            <a:ext cx="543652" cy="475488"/>
+          </a:xfrm>
+          <a:prstGeom prst="rect">
+            <a:avLst/>
+          </a:prstGeom>
+          <a:noFill/>
+          <a:ln/>
+        </p:spPr>
+        <p:txBody>
+          <a:bodyPr wrap="square" lIns="0" tIns="0" rIns="0" bIns="0" rtlCol="0" anchor="ctr"/>
+          <a:lstStyle/>
+          <a:p>
+            <a:pPr algn="ctr" indent="0" marL="0">
+              <a:buNone/>
+            </a:pPr>
+            <a:r>
+              <a:rPr lang="en-US" sz="900" b="1" dirty="0">
+                <a:solidFill>
+                  <a:srgbClr val="9D174D"/>
+                </a:solidFill>
+                <a:latin typeface="Trebuchet MS" pitchFamily="34" charset="0"/>
+                <a:ea typeface="Trebuchet MS" pitchFamily="34" charset="-122"/>
+                <a:cs typeface="Trebuchet MS" pitchFamily="34" charset="-120"/>
+              </a:rPr>
+              <a:t>e</a:t>
+            </a:r>
+            <a:endParaRPr lang="en-US" sz="900" dirty="0"/>
           </a:p>
         </p:txBody>
       </p:sp>
@@ -36499,12 +36514,12 @@
         </p:nvSpPr>
         <p:spPr>
           <a:xfrm>
-            <a:off x="7832252" y="4169664"/>
-            <a:ext cx="603504" cy="384048"/>
+            <a:off x="7891688" y="4169664"/>
+            <a:ext cx="543652" cy="475488"/>
           </a:xfrm>
           <a:prstGeom prst="rect">
             <a:avLst>
-              <a:gd name="adj" fmla="val 9524"/>
+              <a:gd name="adj" fmla="val 7692"/>
             </a:avLst>
           </a:prstGeom>
           <a:solidFill>
@@ -36526,8 +36541,8 @@
         </p:nvSpPr>
         <p:spPr>
           <a:xfrm>
-            <a:off x="7832252" y="4169664"/>
-            <a:ext cx="603504" cy="384048"/>
+            <a:off x="7891688" y="4169664"/>
+            <a:ext cx="543652" cy="475488"/>
           </a:xfrm>
           <a:prstGeom prst="rect">
             <a:avLst/>
@@ -40808,7 +40823,7 @@
                 <a:ea typeface="Calibri" pitchFamily="34" charset="-122"/>
                 <a:cs typeface="Calibri" pitchFamily="34" charset="-120"/>
               </a:rPr>
-              <a:t>1.  You can add the suffix '-ation' to 'organise' to make the noun 'organisation'.</a:t>
+              <a:t>1.  The word 'disorganised' uses the prefix 'dis' to mean the opposite of organised.</a:t>
             </a:r>
             <a:endParaRPr lang="en-US" sz="1300" dirty="0"/>
           </a:p>
@@ -40947,7 +40962,7 @@
                 <a:ea typeface="Calibri" pitchFamily="34" charset="-122"/>
                 <a:cs typeface="Calibri" pitchFamily="34" charset="-120"/>
               </a:rPr>
-              <a:t>2.  The word 'reorganise' means to arrange something again.</a:t>
+              <a:t>2.  You can add the suffix '-ation' to 'organise' to make the noun 'organisation'.</a:t>
             </a:r>
             <a:endParaRPr lang="en-US" sz="1300" dirty="0"/>
           </a:p>
@@ -41086,7 +41101,7 @@
                 <a:ea typeface="Calibri" pitchFamily="34" charset="-122"/>
                 <a:cs typeface="Calibri" pitchFamily="34" charset="-120"/>
               </a:rPr>
-              <a:t>3.  The word 'disorganised' uses the prefix 'dis' to mean the opposite of organised.</a:t>
+              <a:t>3.  An organiser is something that makes a room look messy.</a:t>
             </a:r>
             <a:endParaRPr lang="en-US" sz="1300" dirty="0"/>
           </a:p>
@@ -41109,11 +41124,11 @@
             </a:avLst>
           </a:prstGeom>
           <a:solidFill>
-            <a:srgbClr val="DCFCE7"/>
-          </a:solidFill>
-          <a:ln w="12700">
-            <a:solidFill>
-              <a:srgbClr val="16A34A"/>
+            <a:srgbClr val="FEE2E2"/>
+          </a:solidFill>
+          <a:ln w="12700">
+            <a:solidFill>
+              <a:srgbClr val="DC2626"/>
             </a:solidFill>
             <a:prstDash val="solid"/>
           </a:ln>
@@ -41146,13 +41161,13 @@
             <a:r>
               <a:rPr lang="en-US" sz="1100" b="1" dirty="0">
                 <a:solidFill>
-                  <a:srgbClr val="16A34A"/>
+                  <a:srgbClr val="DC2626"/>
                 </a:solidFill>
                 <a:latin typeface="Trebuchet MS" pitchFamily="34" charset="0"/>
                 <a:ea typeface="Trebuchet MS" pitchFamily="34" charset="-122"/>
                 <a:cs typeface="Trebuchet MS" pitchFamily="34" charset="-120"/>
               </a:rPr>
-              <a:t>TRUE</a:t>
+              <a:t>FALSE</a:t>
             </a:r>
             <a:endParaRPr lang="en-US" sz="1100" dirty="0"/>
           </a:p>
@@ -41225,7 +41240,7 @@
                 <a:ea typeface="Calibri" pitchFamily="34" charset="-122"/>
                 <a:cs typeface="Calibri" pitchFamily="34" charset="-120"/>
               </a:rPr>
-              <a:t>4.  An organiser is something that makes a room look messy.</a:t>
+              <a:t>4.  The word 'reorganise' means to arrange something again.</a:t>
             </a:r>
             <a:endParaRPr lang="en-US" sz="1300" dirty="0"/>
           </a:p>
@@ -41248,11 +41263,11 @@
             </a:avLst>
           </a:prstGeom>
           <a:solidFill>
-            <a:srgbClr val="FEE2E2"/>
-          </a:solidFill>
-          <a:ln w="12700">
-            <a:solidFill>
-              <a:srgbClr val="DC2626"/>
+            <a:srgbClr val="DCFCE7"/>
+          </a:solidFill>
+          <a:ln w="12700">
+            <a:solidFill>
+              <a:srgbClr val="16A34A"/>
             </a:solidFill>
             <a:prstDash val="solid"/>
           </a:ln>
@@ -41285,13 +41300,13 @@
             <a:r>
               <a:rPr lang="en-US" sz="1100" b="1" dirty="0">
                 <a:solidFill>
-                  <a:srgbClr val="DC2626"/>
+                  <a:srgbClr val="16A34A"/>
                 </a:solidFill>
                 <a:latin typeface="Trebuchet MS" pitchFamily="34" charset="0"/>
                 <a:ea typeface="Trebuchet MS" pitchFamily="34" charset="-122"/>
                 <a:cs typeface="Trebuchet MS" pitchFamily="34" charset="-120"/>
               </a:rPr>
-              <a:t>FALSE</a:t>
+              <a:t>TRUE</a:t>
             </a:r>
             <a:endParaRPr lang="en-US" sz="1100" dirty="0"/>
           </a:p>
